--- a/slides/第10回_インターネットとWeb.pptx
+++ b/slides/第10回_インターネットとWeb.pptx
@@ -5576,7 +5576,7 @@
         <p:spPr>
           <a:xfrm>
             <a:off x="685800" y="1481328"/>
-            <a:ext cx="10789920" cy="621792"/>
+            <a:ext cx="10789920" cy="365760"/>
           </a:xfrm>
           <a:prstGeom prst="rect">
             <a:avLst/>
@@ -5625,53 +5625,14 @@
         </p:blipFill>
         <p:spPr>
           <a:xfrm>
-            <a:off x="3588534" y="2139696"/>
-            <a:ext cx="4984453" cy="3346704"/>
+            <a:off x="3397871" y="1883664"/>
+            <a:ext cx="5365777" cy="3602736"/>
           </a:xfrm>
           <a:prstGeom prst="rect">
             <a:avLst/>
           </a:prstGeom>
         </p:spPr>
       </p:pic>
-      <p:sp>
-        <p:nvSpPr>
-          <p:cNvPr id="7" name="Text 4"/>
-          <p:cNvSpPr/>
-          <p:nvPr/>
-        </p:nvSpPr>
-        <p:spPr>
-          <a:xfrm>
-            <a:off x="685800" y="5687568"/>
-            <a:ext cx="10789920" cy="365760"/>
-          </a:xfrm>
-          <a:prstGeom prst="rect">
-            <a:avLst/>
-          </a:prstGeom>
-          <a:noFill/>
-          <a:ln/>
-        </p:spPr>
-        <p:txBody>
-          <a:bodyPr wrap="square" lIns="0" tIns="0" rIns="0" bIns="0" rtlCol="0" anchor="ctr"/>
-          <a:lstStyle/>
-          <a:p>
-            <a:pPr algn="ctr" indent="0" marL="0">
-              <a:buNone/>
-            </a:pPr>
-            <a:r>
-              <a:rPr lang="en-US" sz="1500" dirty="0">
-                <a:solidFill>
-                  <a:srgbClr val="16191D"/>
-                </a:solidFill>
-                <a:latin typeface="Yu Gothic" pitchFamily="34" charset="0"/>
-                <a:ea typeface="Yu Gothic" pitchFamily="34" charset="-122"/>
-                <a:cs typeface="Yu Gothic" pitchFamily="34" charset="-120"/>
-              </a:rPr>
-              <a:t>accept は新しいソケットを返す。元のソケットは受付専用として残り、次の接続を待ち続けられる。</a:t>
-            </a:r>
-            <a:endParaRPr lang="en-US" sz="1500" dirty="0"/>
-          </a:p>
-        </p:txBody>
-      </p:sp>
     </p:spTree>
   </p:cSld>
   <p:clrMapOvr>
@@ -6669,7 +6630,7 @@
         <p:spPr>
           <a:xfrm>
             <a:off x="685800" y="1481328"/>
-            <a:ext cx="10789920" cy="621792"/>
+            <a:ext cx="10789920" cy="566928"/>
           </a:xfrm>
           <a:prstGeom prst="rect">
             <a:avLst/>
@@ -6710,7 +6671,7 @@
         </p:nvSpPr>
         <p:spPr>
           <a:xfrm>
-            <a:off x="685800" y="2185416"/>
+            <a:off x="685800" y="2130552"/>
             <a:ext cx="10789920" cy="713232"/>
           </a:xfrm>
           <a:prstGeom prst="roundRect">
@@ -6737,7 +6698,7 @@
         </p:nvSpPr>
         <p:spPr>
           <a:xfrm>
-            <a:off x="914400" y="2340864"/>
+            <a:off x="914400" y="2286000"/>
             <a:ext cx="10332720" cy="402336"/>
           </a:xfrm>
           <a:prstGeom prst="rect">
@@ -6776,7 +6737,7 @@
         </p:nvSpPr>
         <p:spPr>
           <a:xfrm>
-            <a:off x="1188720" y="3145536"/>
+            <a:off x="1188720" y="3090672"/>
             <a:ext cx="4572000" cy="457200"/>
           </a:xfrm>
           <a:prstGeom prst="rect">
@@ -6815,7 +6776,7 @@
         </p:nvSpPr>
         <p:spPr>
           <a:xfrm>
-            <a:off x="5943600" y="3273552"/>
+            <a:off x="5943600" y="3218688"/>
             <a:ext cx="640080" cy="201168"/>
           </a:xfrm>
           <a:prstGeom prst="rightArrow">
@@ -6835,7 +6796,7 @@
         </p:nvSpPr>
         <p:spPr>
           <a:xfrm>
-            <a:off x="6766560" y="3145536"/>
+            <a:off x="6766560" y="3090672"/>
             <a:ext cx="4206240" cy="457200"/>
           </a:xfrm>
           <a:prstGeom prst="rect">
@@ -6874,7 +6835,7 @@
         </p:nvSpPr>
         <p:spPr>
           <a:xfrm>
-            <a:off x="1188720" y="3767328"/>
+            <a:off x="1188720" y="3712464"/>
             <a:ext cx="4572000" cy="457200"/>
           </a:xfrm>
           <a:prstGeom prst="rect">
@@ -6913,7 +6874,7 @@
         </p:nvSpPr>
         <p:spPr>
           <a:xfrm>
-            <a:off x="5943600" y="3895344"/>
+            <a:off x="5943600" y="3840480"/>
             <a:ext cx="640080" cy="201168"/>
           </a:xfrm>
           <a:prstGeom prst="rightArrow">
@@ -6933,7 +6894,7 @@
         </p:nvSpPr>
         <p:spPr>
           <a:xfrm>
-            <a:off x="6766560" y="3767328"/>
+            <a:off x="6766560" y="3712464"/>
             <a:ext cx="4206240" cy="457200"/>
           </a:xfrm>
           <a:prstGeom prst="rect">
@@ -6972,7 +6933,7 @@
         </p:nvSpPr>
         <p:spPr>
           <a:xfrm>
-            <a:off x="1188720" y="4389120"/>
+            <a:off x="1188720" y="4334256"/>
             <a:ext cx="4572000" cy="457200"/>
           </a:xfrm>
           <a:prstGeom prst="rect">
@@ -7011,7 +6972,7 @@
         </p:nvSpPr>
         <p:spPr>
           <a:xfrm>
-            <a:off x="5943600" y="4517136"/>
+            <a:off x="5943600" y="4462272"/>
             <a:ext cx="640080" cy="201168"/>
           </a:xfrm>
           <a:prstGeom prst="rightArrow">
@@ -7031,7 +6992,7 @@
         </p:nvSpPr>
         <p:spPr>
           <a:xfrm>
-            <a:off x="6766560" y="4389120"/>
+            <a:off x="6766560" y="4334256"/>
             <a:ext cx="4206240" cy="457200"/>
           </a:xfrm>
           <a:prstGeom prst="rect">
@@ -7070,7 +7031,7 @@
         </p:nvSpPr>
         <p:spPr>
           <a:xfrm>
-            <a:off x="685800" y="5102352"/>
+            <a:off x="685800" y="5047488"/>
             <a:ext cx="10789920" cy="457200"/>
           </a:xfrm>
           <a:prstGeom prst="rect">
@@ -8181,7 +8142,7 @@
         <p:spPr>
           <a:xfrm>
             <a:off x="685800" y="1481328"/>
-            <a:ext cx="10789920" cy="621792"/>
+            <a:ext cx="10789920" cy="365760"/>
           </a:xfrm>
           <a:prstGeom prst="rect">
             <a:avLst/>
@@ -8230,8 +8191,8 @@
         </p:blipFill>
         <p:spPr>
           <a:xfrm>
-            <a:off x="3291840" y="2139696"/>
-            <a:ext cx="5577840" cy="3346704"/>
+            <a:off x="3078480" y="1883664"/>
+            <a:ext cx="6004560" cy="3602736"/>
           </a:xfrm>
           <a:prstGeom prst="rect">
             <a:avLst/>
@@ -20244,45 +20205,6 @@
           </a:prstGeom>
         </p:spPr>
       </p:pic>
-      <p:sp>
-        <p:nvSpPr>
-          <p:cNvPr id="6" name="Text 3"/>
-          <p:cNvSpPr/>
-          <p:nvPr/>
-        </p:nvSpPr>
-        <p:spPr>
-          <a:xfrm>
-            <a:off x="685800" y="5687568"/>
-            <a:ext cx="10789920" cy="365760"/>
-          </a:xfrm>
-          <a:prstGeom prst="rect">
-            <a:avLst/>
-          </a:prstGeom>
-          <a:noFill/>
-          <a:ln/>
-        </p:spPr>
-        <p:txBody>
-          <a:bodyPr wrap="square" lIns="0" tIns="0" rIns="0" bIns="0" rtlCol="0" anchor="ctr"/>
-          <a:lstStyle/>
-          <a:p>
-            <a:pPr algn="ctr" indent="0" marL="0">
-              <a:buNone/>
-            </a:pPr>
-            <a:r>
-              <a:rPr lang="en-US" sz="1500" dirty="0">
-                <a:solidFill>
-                  <a:srgbClr val="16191D"/>
-                </a:solidFill>
-                <a:latin typeface="Yu Gothic" pitchFamily="34" charset="0"/>
-                <a:ea typeface="Yu Gothic" pitchFamily="34" charset="-122"/>
-                <a:cs typeface="Yu Gothic" pitchFamily="34" charset="-120"/>
-              </a:rPr>
-              <a:t>IP は最終目的地、MAC は次の1ホップを表す。</a:t>
-            </a:r>
-            <a:endParaRPr lang="en-US" sz="1500" dirty="0"/>
-          </a:p>
-        </p:txBody>
-      </p:sp>
     </p:spTree>
   </p:cSld>
   <p:clrMapOvr>
@@ -20441,7 +20363,7 @@
         <p:spPr>
           <a:xfrm>
             <a:off x="685800" y="1481328"/>
-            <a:ext cx="10789920" cy="621792"/>
+            <a:ext cx="10789920" cy="365760"/>
           </a:xfrm>
           <a:prstGeom prst="rect">
             <a:avLst/>
@@ -20490,8 +20412,8 @@
         </p:blipFill>
         <p:spPr>
           <a:xfrm>
-            <a:off x="2827020" y="2139696"/>
-            <a:ext cx="6507480" cy="3346704"/>
+            <a:off x="2578100" y="1883664"/>
+            <a:ext cx="7005320" cy="3602736"/>
           </a:xfrm>
           <a:prstGeom prst="rect">
             <a:avLst/>

--- a/slides/第10回_インターネットとWeb.pptx
+++ b/slides/第10回_インターネットとWeb.pptx
@@ -17124,45 +17124,6 @@
         </p:nvSpPr>
         <p:spPr>
           <a:xfrm>
-            <a:off x="685800" y="5687568"/>
-            <a:ext cx="10789920" cy="365760"/>
-          </a:xfrm>
-          <a:prstGeom prst="rect">
-            <a:avLst/>
-          </a:prstGeom>
-          <a:noFill/>
-          <a:ln/>
-        </p:spPr>
-        <p:txBody>
-          <a:bodyPr wrap="square" lIns="0" tIns="0" rIns="0" bIns="0" rtlCol="0" anchor="ctr"/>
-          <a:lstStyle/>
-          <a:p>
-            <a:pPr algn="ctr" indent="0" marL="0">
-              <a:buNone/>
-            </a:pPr>
-            <a:r>
-              <a:rPr lang="en-US" sz="1500" dirty="0">
-                <a:solidFill>
-                  <a:srgbClr val="16191D"/>
-                </a:solidFill>
-                <a:latin typeface="Yu Gothic" pitchFamily="34" charset="0"/>
-                <a:ea typeface="Yu Gothic" pitchFamily="34" charset="-122"/>
-                <a:cs typeface="Yu Gothic" pitchFamily="34" charset="-120"/>
-              </a:rPr>
-              <a:t>双方が「自分の開始番号を伝える」と「相手の番号を受け取った」を確認する最小の回数が3回。</a:t>
-            </a:r>
-            <a:endParaRPr lang="en-US" sz="1500" dirty="0"/>
-          </a:p>
-        </p:txBody>
-      </p:sp>
-      <p:sp>
-        <p:nvSpPr>
-          <p:cNvPr id="7" name="Text 4"/>
-          <p:cNvSpPr/>
-          <p:nvPr/>
-        </p:nvSpPr>
-        <p:spPr>
-          <a:xfrm>
             <a:off x="685800" y="6071616"/>
             <a:ext cx="10789920" cy="640080"/>
           </a:xfrm>

--- a/slides/第10回_インターネットとWeb.pptx
+++ b/slides/第10回_インターネットとWeb.pptx
@@ -12539,7 +12539,7 @@
                 <a:ea typeface="Courier New" pitchFamily="34" charset="-122"/>
                 <a:cs typeface="Courier New" pitchFamily="34" charset="-120"/>
               </a:rPr>
-              <a:t>10-3</a:t>
+              <a:t>10-5</a:t>
             </a:r>
             <a:endParaRPr lang="en-US" sz="1300" dirty="0"/>
           </a:p>
@@ -12647,7 +12647,7 @@
                 <a:ea typeface="Courier New" pitchFamily="34" charset="-122"/>
                 <a:cs typeface="Courier New" pitchFamily="34" charset="-120"/>
               </a:rPr>
-              <a:t>10-4</a:t>
+              <a:t>10-6</a:t>
             </a:r>
             <a:endParaRPr lang="en-US" sz="1300" dirty="0"/>
           </a:p>
